--- a/slides/10 Pokemon.pptx
+++ b/slides/10 Pokemon.pptx
@@ -1932,7 +1932,7 @@
           <a:lstStyle/>
           <a:p>
             <a:r>
-              <a:t>Exercises: a glass cannon, types, save and load.</a:t>
+              <a:t>Exercises: a a glass cannon, save and load, and more on the site.</a:t>
             </a:r>
           </a:p>
           <a:p>
@@ -12313,23 +12313,6 @@
             </a:pPr>
             <a:r>
               <a:rPr lang="en"/>
-              <a:t>Types: Fire, Water, Grass, and super-effective hits</a:t>
-            </a:r>
-            <a:endParaRPr/>
-          </a:p>
-          <a:p>
-            <a:pPr indent="-330200" lvl="0" marL="457200" rtl="0" algn="l">
-              <a:spcBef>
-                <a:spcPts val="0"/>
-              </a:spcBef>
-              <a:spcAft>
-                <a:spcPts val="0"/>
-              </a:spcAft>
-              <a:buSzPts val="1600"/>
-              <a:buChar char="●"/>
-            </a:pPr>
-            <a:r>
-              <a:rPr lang="en"/>
               <a:t>Save and load the party, with a round-trip test</a:t>
             </a:r>
             <a:endParaRPr/>

--- a/slides/10 Pokemon.pptx
+++ b/slides/10 Pokemon.pptx
@@ -1932,7 +1932,7 @@
           <a:lstStyle/>
           <a:p>
             <a:r>
-              <a:t>Exercises: a a glass cannon, save and load, and more on the site.</a:t>
+              <a:t>Exercises: a a new species, save and load, and more on the site.</a:t>
             </a:r>
           </a:p>
           <a:p>
@@ -12296,7 +12296,7 @@
             </a:pPr>
             <a:r>
               <a:rPr lang="en"/>
-              <a:t>A glass cannon: a new species, only in the JSON</a:t>
+              <a:t>A new species that hits hard and breaks easily, only in the JSON</a:t>
             </a:r>
             <a:endParaRPr/>
           </a:p>

--- a/slides/10 Pokemon.pptx
+++ b/slides/10 Pokemon.pptx
@@ -1932,7 +1932,7 @@
           <a:lstStyle/>
           <a:p>
             <a:r>
-              <a:t>Exercises: a a new species, save and load, and more on the site.</a:t>
+              <a:t>Exercises: a new species, save and load, and more on the site.</a:t>
             </a:r>
           </a:p>
           <a:p>

--- a/slides/10 Pokemon.pptx
+++ b/slides/10 Pokemon.pptx
@@ -1932,7 +1932,17 @@
           <a:lstStyle/>
           <a:p>
             <a:r>
-              <a:t>Exercises: a new species, save and load, and more on the site.</a:t>
+              <a:t>Exercises: a new species, save and load, a pause menu, mute, a health bar that listens, and two stretch ones.</a:t>
+            </a:r>
+          </a:p>
+          <a:p>
+            <a:r>
+              <a:t>Mute is the Service Locator against Flappy’s Singleton. Ask afterwards: what happened to the music that was already playing?</a:t>
+            </a:r>
+          </a:p>
+          <a:p>
+            <a:r>
+              <a:t>The listening bar is Observer for UI. Ask: where did you unsubscribe?</a:t>
             </a:r>
           </a:p>
           <a:p>
@@ -12234,7 +12244,7 @@
                   <a:schemeClr val="accent5"/>
                 </a:solidFill>
               </a:rPr>
-              <a:t>Data-Driven Definitions</a:t>
+              <a:t>Exercises</a:t>
             </a:r>
             <a:endParaRPr>
               <a:solidFill>
@@ -12314,6 +12324,74 @@
             <a:r>
               <a:rPr lang="en"/>
               <a:t>Save and load the party, with a round-trip test</a:t>
+            </a:r>
+            <a:endParaRPr/>
+          </a:p>
+          <a:p>
+            <a:pPr indent="-330200" lvl="0" marL="457200" rtl="0" algn="l">
+              <a:spcBef>
+                <a:spcPts val="0"/>
+              </a:spcBef>
+              <a:spcAft>
+                <a:spcPts val="0"/>
+              </a:spcAft>
+              <a:buSzPts val="1600"/>
+              <a:buChar char="●"/>
+            </a:pPr>
+            <a:r>
+              <a:rPr lang="en"/>
+              <a:t>A pause menu on the stack, built from a Panel and a Menu</a:t>
+            </a:r>
+            <a:endParaRPr/>
+          </a:p>
+          <a:p>
+            <a:pPr indent="-330200" lvl="0" marL="457200" rtl="0" algn="l">
+              <a:spcBef>
+                <a:spcPts val="0"/>
+              </a:spcBef>
+              <a:spcAft>
+                <a:spcPts val="0"/>
+              </a:spcAft>
+              <a:buSzPts val="1600"/>
+              <a:buChar char="●"/>
+            </a:pPr>
+            <a:r>
+              <a:rPr lang="en"/>
+              <a:t>Mute: swap the audio service while the game runs</a:t>
+            </a:r>
+            <a:endParaRPr/>
+          </a:p>
+          <a:p>
+            <a:pPr indent="-330200" lvl="0" marL="457200" rtl="0" algn="l">
+              <a:spcBef>
+                <a:spcPts val="0"/>
+              </a:spcBef>
+              <a:spcAft>
+                <a:spcPts val="0"/>
+              </a:spcAft>
+              <a:buSzPts val="1600"/>
+              <a:buChar char="●"/>
+            </a:pPr>
+            <a:r>
+              <a:rPr lang="en"/>
+              <a:t>A health bar that listens to its monster, with an event</a:t>
+            </a:r>
+            <a:endParaRPr/>
+          </a:p>
+          <a:p>
+            <a:pPr indent="-330200" lvl="0" marL="457200" rtl="0" algn="l">
+              <a:spcBef>
+                <a:spcPts val="0"/>
+              </a:spcBef>
+              <a:spcAft>
+                <a:spcPts val="0"/>
+              </a:spcAft>
+              <a:buSzPts val="1600"/>
+              <a:buChar char="●"/>
+            </a:pPr>
+            <a:r>
+              <a:rPr lang="en"/>
+              <a:t>Stretch: catching with a party menu, and types</a:t>
             </a:r>
             <a:endParaRPr/>
           </a:p>

--- a/slides/10 Pokemon.pptx
+++ b/slides/10 Pokemon.pptx
@@ -39,6 +39,8 @@
     <p:sldId id="276" r:id="rId26"/>
     <p:sldId id="288" r:id="rId40"/>
     <p:sldId id="277" r:id="rId27"/>
+    <p:sldId id="291" r:id="rId48"/>
+    <p:sldId id="292" r:id="rId49"/>
     <p:sldId id="284" r:id="rId42"/>
     <p:sldId id="281" r:id="rId39"/>
   </p:sldIdLst>
@@ -3011,6 +3013,127 @@
           <a:p>
             <a:r>
               <a:t>Dismissing pops it, and PlayState is on top again, as it was. PlayState needs to know nothing about what comes after.</a:t>
+            </a:r>
+          </a:p>
+        </p:txBody>
+      </p:sp>
+    </p:spTree>
+  </p:cSld>
+  <p:clrMapOvr>
+    <a:masterClrMapping/>
+  </p:clrMapOvr>
+</p:notes>
+</file>
+
+<file path=ppt/notesSlides/notesSlide34.xml><?xml version="1.0" encoding="utf-8"?>
+<p:notes xmlns:a="http://schemas.openxmlformats.org/drawingml/2006/main" xmlns:p="http://schemas.openxmlformats.org/presentationml/2006/main" xmlns:r="http://schemas.openxmlformats.org/officeDocument/2006/relationships">
+  <p:cSld>
+    <p:spTree>
+      <p:nvGrpSpPr>
+        <p:cNvPr id="1" name=""/>
+        <p:cNvGrpSpPr/>
+        <p:nvPr/>
+      </p:nvGrpSpPr>
+      <p:grpSpPr>
+        <a:xfrm>
+          <a:off x="0" y="0"/>
+          <a:ext cx="0" cy="0"/>
+          <a:chOff x="0" y="0"/>
+          <a:chExt cx="0" cy="0"/>
+        </a:xfrm>
+      </p:grpSpPr>
+      <p:sp>
+        <p:nvSpPr>
+          <p:cNvPr id="2" name="Slide Image Placeholder 1"/>
+          <p:cNvSpPr>
+            <a:spLocks noGrp="1"/>
+          </p:cNvSpPr>
+          <p:nvPr>
+            <p:ph type="sldImg" idx="2"/>
+          </p:nvPr>
+        </p:nvSpPr>
+        <p:spPr/>
+      </p:sp>
+      <p:sp>
+        <p:nvSpPr>
+          <p:cNvPr id="3" name="Notes Placeholder 2"/>
+          <p:cNvSpPr>
+            <a:spLocks noGrp="1"/>
+          </p:cNvSpPr>
+          <p:nvPr>
+            <p:ph type="body" idx="1"/>
+          </p:nvPr>
+        </p:nvSpPr>
+        <p:spPr/>
+        <p:txBody>
+          <a:bodyPr/>
+          <a:lstStyle/>
+          <a:p>
+            <a:r>
+              <a:t>Who holds what in the finished Pokemon. The stack holds the states; the field and the battle each hold their part of the game data.</a:t>
+            </a:r>
+          </a:p>
+          <a:p>
+            <a:r>
+              <a:t>The locator is the one global thing left. Ask: which boxes use it, and can you tell from the diagram?</a:t>
+            </a:r>
+          </a:p>
+        </p:txBody>
+      </p:sp>
+    </p:spTree>
+  </p:cSld>
+  <p:clrMapOvr>
+    <a:masterClrMapping/>
+  </p:clrMapOvr>
+</p:notes>
+</file>
+
+<file path=ppt/notesSlides/notesSlide35.xml><?xml version="1.0" encoding="utf-8"?>
+<p:notes xmlns:a="http://schemas.openxmlformats.org/drawingml/2006/main" xmlns:p="http://schemas.openxmlformats.org/presentationml/2006/main" xmlns:r="http://schemas.openxmlformats.org/officeDocument/2006/relationships">
+  <p:cSld>
+    <p:spTree>
+      <p:nvGrpSpPr>
+        <p:cNvPr id="1" name=""/>
+        <p:cNvGrpSpPr/>
+        <p:nvPr/>
+      </p:nvGrpSpPr>
+      <p:grpSpPr>
+        <a:xfrm>
+          <a:off x="0" y="0"/>
+          <a:ext cx="0" cy="0"/>
+          <a:chOff x="0" y="0"/>
+          <a:chExt cx="0" cy="0"/>
+        </a:xfrm>
+      </p:grpSpPr>
+      <p:sp>
+        <p:nvSpPr>
+          <p:cNvPr id="2" name="Slide Image Placeholder 1"/>
+          <p:cNvSpPr>
+            <a:spLocks noGrp="1"/>
+          </p:cNvSpPr>
+          <p:nvPr>
+            <p:ph type="sldImg" idx="2"/>
+          </p:nvPr>
+        </p:nvSpPr>
+        <p:spPr/>
+      </p:sp>
+      <p:sp>
+        <p:nvSpPr>
+          <p:cNvPr id="3" name="Notes Placeholder 2"/>
+          <p:cNvSpPr>
+            <a:spLocks noGrp="1"/>
+          </p:cNvSpPr>
+          <p:nvPr>
+            <p:ph type="body" idx="1"/>
+          </p:nvPr>
+        </p:nvSpPr>
+        <p:spPr/>
+        <p:txBody>
+          <a:bodyPr/>
+          <a:lstStyle/>
+          <a:p>
+            <a:r>
+              <a:t>The session in one slide. Read each concern aloud and let the class give the answer before pointing at it.</a:t>
             </a:r>
           </a:p>
         </p:txBody>
@@ -13374,6 +13497,1502 @@
 </p:sld>
 </file>
 
+<file path=ppt/slides/slide34.xml><?xml version="1.0" encoding="utf-8"?>
+<p:sld xmlns:a="http://schemas.openxmlformats.org/drawingml/2006/main" xmlns:p="http://schemas.openxmlformats.org/presentationml/2006/main" xmlns:r="http://schemas.openxmlformats.org/officeDocument/2006/relationships">
+  <p:cSld>
+    <p:spTree>
+      <p:nvGrpSpPr>
+        <p:cNvPr id="1" name=""/>
+        <p:cNvGrpSpPr/>
+        <p:nvPr/>
+      </p:nvGrpSpPr>
+      <p:grpSpPr/>
+      <p:sp>
+        <p:nvSpPr>
+          <p:cNvPr id="2" name="Title 1"/>
+          <p:cNvSpPr>
+            <a:spLocks noGrp="1"/>
+          </p:cNvSpPr>
+          <p:nvPr>
+            <p:ph type="title"/>
+          </p:nvPr>
+        </p:nvSpPr>
+        <p:spPr/>
+        <p:txBody>
+          <a:bodyPr/>
+          <a:lstStyle/>
+          <a:p>
+            <a:pPr indent="0" lvl="0" marL="0" rtl="0" algn="l">
+              <a:spcBef>
+                <a:spcPts val="0"/>
+              </a:spcBef>
+              <a:spcAft>
+                <a:spcPts val="0"/>
+              </a:spcAft>
+              <a:buNone/>
+            </a:pPr>
+            <a:r>
+              <a:rPr lang="en"/>
+              <a:t>The Whole Game</a:t>
+            </a:r>
+            <a:endParaRPr/>
+          </a:p>
+        </p:txBody>
+      </p:sp>
+      <p:sp>
+        <p:nvSpPr>
+          <p:cNvPr id="3" name="Text Placeholder 2"/>
+          <p:cNvSpPr>
+            <a:spLocks noGrp="1"/>
+          </p:cNvSpPr>
+          <p:nvPr>
+            <p:ph type="body" idx="1"/>
+          </p:nvPr>
+        </p:nvSpPr>
+        <p:spPr>
+          <a:xfrm>
+            <a:off x="311700" y="885950"/>
+            <a:ext cx="8520600" cy="521208"/>
+          </a:xfrm>
+        </p:spPr>
+        <p:txBody>
+          <a:bodyPr/>
+          <a:lstStyle/>
+          <a:p>
+            <a:pPr indent="-330200" lvl="0" marL="457200" rtl="0" algn="l">
+              <a:spcBef>
+                <a:spcPts val="0"/>
+              </a:spcBef>
+              <a:spcAft>
+                <a:spcPts val="0"/>
+              </a:spcAft>
+              <a:buSzPts val="1600"/>
+              <a:buChar char="●"/>
+            </a:pPr>
+            <a:r>
+              <a:rPr lang="en" b="1"/>
+              <a:t>Pokemon4 registers a real audio service. Game1 owns the stack and fills the locator.</a:t>
+            </a:r>
+            <a:endParaRPr/>
+          </a:p>
+        </p:txBody>
+      </p:sp>
+      <p:sp>
+        <p:nvSpPr>
+          <p:cNvPr id="4" name="Rounded Rectangle 3"/>
+          <p:cNvSpPr/>
+          <p:nvPr/>
+        </p:nvSpPr>
+        <p:spPr>
+          <a:xfrm>
+            <a:off x="3429000" y="1481328"/>
+            <a:ext cx="2286000" cy="566928"/>
+          </a:xfrm>
+          <a:prstGeom prst="roundRect">
+            <a:avLst>
+              <a:gd name="adj" fmla="val 12000"/>
+            </a:avLst>
+          </a:prstGeom>
+          <a:solidFill>
+            <a:srgbClr val="2E3338"/>
+          </a:solidFill>
+          <a:ln w="25400">
+            <a:solidFill>
+              <a:srgbClr val="D45D35"/>
+            </a:solidFill>
+          </a:ln>
+          <a:effectLst/>
+        </p:spPr>
+        <p:style>
+          <a:lnRef idx="1">
+            <a:schemeClr val="accent1"/>
+          </a:lnRef>
+          <a:fillRef idx="3">
+            <a:schemeClr val="accent1"/>
+          </a:fillRef>
+          <a:effectRef idx="2">
+            <a:schemeClr val="accent1"/>
+          </a:effectRef>
+          <a:fontRef idx="minor">
+            <a:schemeClr val="lt1"/>
+          </a:fontRef>
+        </p:style>
+        <p:txBody>
+          <a:bodyPr rtlCol="0" anchor="ctr" wrap="square" lIns="73152" rIns="73152"/>
+          <a:lstStyle/>
+          <a:p>
+            <a:pPr algn="ctr"/>
+            <a:r>
+              <a:rPr sz="1300" b="1">
+                <a:solidFill>
+                  <a:srgbClr val="DEE2E6"/>
+                </a:solidFill>
+              </a:rPr>
+              <a:t>Game1 : Core</a:t>
+            </a:r>
+          </a:p>
+        </p:txBody>
+      </p:sp>
+      <p:sp>
+        <p:nvSpPr>
+          <p:cNvPr id="5" name="Rounded Rectangle 4"/>
+          <p:cNvSpPr/>
+          <p:nvPr/>
+        </p:nvSpPr>
+        <p:spPr>
+          <a:xfrm>
+            <a:off x="2366010" y="2246376"/>
+            <a:ext cx="2286000" cy="566928"/>
+          </a:xfrm>
+          <a:prstGeom prst="roundRect">
+            <a:avLst>
+              <a:gd name="adj" fmla="val 12000"/>
+            </a:avLst>
+          </a:prstGeom>
+          <a:solidFill>
+            <a:srgbClr val="2E3338"/>
+          </a:solidFill>
+          <a:ln>
+            <a:noFill/>
+          </a:ln>
+          <a:effectLst/>
+        </p:spPr>
+        <p:style>
+          <a:lnRef idx="1">
+            <a:schemeClr val="accent1"/>
+          </a:lnRef>
+          <a:fillRef idx="3">
+            <a:schemeClr val="accent1"/>
+          </a:fillRef>
+          <a:effectRef idx="2">
+            <a:schemeClr val="accent1"/>
+          </a:effectRef>
+          <a:fontRef idx="minor">
+            <a:schemeClr val="lt1"/>
+          </a:fontRef>
+        </p:style>
+        <p:txBody>
+          <a:bodyPr rtlCol="0" anchor="ctr" wrap="square" lIns="73152" rIns="73152"/>
+          <a:lstStyle/>
+          <a:p>
+            <a:pPr algn="ctr"/>
+            <a:r>
+              <a:rPr sz="1300" b="1">
+                <a:solidFill>
+                  <a:srgbClr val="DEE2E6"/>
+                </a:solidFill>
+              </a:rPr>
+              <a:t>StateStack</a:t>
+            </a:r>
+          </a:p>
+          <a:p>
+            <a:pPr algn="ctr"/>
+            <a:r>
+              <a:rPr sz="1100" b="0">
+                <a:solidFill>
+                  <a:srgbClr val="9AA3AB"/>
+                </a:solidFill>
+              </a:rPr>
+              <a:t>many states</a:t>
+            </a:r>
+          </a:p>
+        </p:txBody>
+      </p:sp>
+      <p:sp>
+        <p:nvSpPr>
+          <p:cNvPr id="6" name="Rounded Rectangle 5"/>
+          <p:cNvSpPr/>
+          <p:nvPr/>
+        </p:nvSpPr>
+        <p:spPr>
+          <a:xfrm>
+            <a:off x="374904" y="3011424"/>
+            <a:ext cx="2016252" cy="566928"/>
+          </a:xfrm>
+          <a:prstGeom prst="roundRect">
+            <a:avLst>
+              <a:gd name="adj" fmla="val 12000"/>
+            </a:avLst>
+          </a:prstGeom>
+          <a:solidFill>
+            <a:srgbClr val="2E3338"/>
+          </a:solidFill>
+          <a:ln>
+            <a:noFill/>
+          </a:ln>
+          <a:effectLst/>
+        </p:spPr>
+        <p:style>
+          <a:lnRef idx="1">
+            <a:schemeClr val="accent1"/>
+          </a:lnRef>
+          <a:fillRef idx="3">
+            <a:schemeClr val="accent1"/>
+          </a:fillRef>
+          <a:effectRef idx="2">
+            <a:schemeClr val="accent1"/>
+          </a:effectRef>
+          <a:fontRef idx="minor">
+            <a:schemeClr val="lt1"/>
+          </a:fontRef>
+        </p:style>
+        <p:txBody>
+          <a:bodyPr rtlCol="0" anchor="ctr" wrap="square" lIns="73152" rIns="73152"/>
+          <a:lstStyle/>
+          <a:p>
+            <a:pPr algn="ctr"/>
+            <a:r>
+              <a:rPr sz="1300" b="1">
+                <a:solidFill>
+                  <a:srgbClr val="DEE2E6"/>
+                </a:solidFill>
+              </a:rPr>
+              <a:t>PlayState</a:t>
+            </a:r>
+          </a:p>
+        </p:txBody>
+      </p:sp>
+      <p:sp>
+        <p:nvSpPr>
+          <p:cNvPr id="7" name="Rounded Rectangle 6"/>
+          <p:cNvSpPr/>
+          <p:nvPr/>
+        </p:nvSpPr>
+        <p:spPr>
+          <a:xfrm>
+            <a:off x="374904" y="3776472"/>
+            <a:ext cx="2016252" cy="566928"/>
+          </a:xfrm>
+          <a:prstGeom prst="roundRect">
+            <a:avLst>
+              <a:gd name="adj" fmla="val 12000"/>
+            </a:avLst>
+          </a:prstGeom>
+          <a:solidFill>
+            <a:srgbClr val="2E3338"/>
+          </a:solidFill>
+          <a:ln>
+            <a:noFill/>
+          </a:ln>
+          <a:effectLst/>
+        </p:spPr>
+        <p:style>
+          <a:lnRef idx="1">
+            <a:schemeClr val="accent1"/>
+          </a:lnRef>
+          <a:fillRef idx="3">
+            <a:schemeClr val="accent1"/>
+          </a:fillRef>
+          <a:effectRef idx="2">
+            <a:schemeClr val="accent1"/>
+          </a:effectRef>
+          <a:fontRef idx="minor">
+            <a:schemeClr val="lt1"/>
+          </a:fontRef>
+        </p:style>
+        <p:txBody>
+          <a:bodyPr rtlCol="0" anchor="ctr" wrap="square" lIns="73152" rIns="73152"/>
+          <a:lstStyle/>
+          <a:p>
+            <a:pPr algn="ctr"/>
+            <a:r>
+              <a:rPr sz="1300" b="1">
+                <a:solidFill>
+                  <a:srgbClr val="DEE2E6"/>
+                </a:solidFill>
+              </a:rPr>
+              <a:t>Level</a:t>
+            </a:r>
+          </a:p>
+          <a:p>
+            <a:pPr algn="ctr"/>
+            <a:r>
+              <a:rPr sz="1100" b="0">
+                <a:solidFill>
+                  <a:srgbClr val="9AA3AB"/>
+                </a:solidFill>
+              </a:rPr>
+              <a:t>player and party</a:t>
+            </a:r>
+          </a:p>
+        </p:txBody>
+      </p:sp>
+      <p:cxnSp>
+        <p:nvCxnSpPr>
+          <p:cNvPr id="8" name="Connector 7"/>
+          <p:cNvCxnSpPr/>
+          <p:nvPr/>
+        </p:nvCxnSpPr>
+        <p:spPr>
+          <a:xfrm>
+            <a:off x="1383030" y="3596640"/>
+            <a:ext cx="0" cy="161544"/>
+          </a:xfrm>
+          <a:prstGeom prst="line">
+            <a:avLst/>
+          </a:prstGeom>
+          <a:ln w="25400">
+            <a:solidFill>
+              <a:srgbClr val="9AA3AB"/>
+            </a:solidFill>
+            <a:tailEnd type="triangle"/>
+          </a:ln>
+        </p:spPr>
+        <p:style>
+          <a:lnRef idx="2">
+            <a:schemeClr val="accent1"/>
+          </a:lnRef>
+          <a:fillRef idx="0">
+            <a:schemeClr val="accent1"/>
+          </a:fillRef>
+          <a:effectRef idx="1">
+            <a:schemeClr val="accent1"/>
+          </a:effectRef>
+          <a:fontRef idx="minor">
+            <a:schemeClr val="tx1"/>
+          </a:fontRef>
+        </p:style>
+      </p:cxnSp>
+      <p:cxnSp>
+        <p:nvCxnSpPr>
+          <p:cNvPr id="9" name="Connector 8"/>
+          <p:cNvCxnSpPr/>
+          <p:nvPr/>
+        </p:nvCxnSpPr>
+        <p:spPr>
+          <a:xfrm flipH="1">
+            <a:off x="1383030" y="2831592"/>
+            <a:ext cx="2125980" cy="161544"/>
+          </a:xfrm>
+          <a:prstGeom prst="line">
+            <a:avLst/>
+          </a:prstGeom>
+          <a:ln w="25400">
+            <a:solidFill>
+              <a:srgbClr val="9AA3AB"/>
+            </a:solidFill>
+            <a:tailEnd type="triangle"/>
+          </a:ln>
+        </p:spPr>
+        <p:style>
+          <a:lnRef idx="2">
+            <a:schemeClr val="accent1"/>
+          </a:lnRef>
+          <a:fillRef idx="0">
+            <a:schemeClr val="accent1"/>
+          </a:fillRef>
+          <a:effectRef idx="1">
+            <a:schemeClr val="accent1"/>
+          </a:effectRef>
+          <a:fontRef idx="minor">
+            <a:schemeClr val="tx1"/>
+          </a:fontRef>
+        </p:style>
+      </p:cxnSp>
+      <p:sp>
+        <p:nvSpPr>
+          <p:cNvPr id="10" name="Rounded Rectangle 9"/>
+          <p:cNvSpPr/>
+          <p:nvPr/>
+        </p:nvSpPr>
+        <p:spPr>
+          <a:xfrm>
+            <a:off x="2500884" y="3011424"/>
+            <a:ext cx="2016252" cy="566928"/>
+          </a:xfrm>
+          <a:prstGeom prst="roundRect">
+            <a:avLst>
+              <a:gd name="adj" fmla="val 12000"/>
+            </a:avLst>
+          </a:prstGeom>
+          <a:solidFill>
+            <a:srgbClr val="2E3338"/>
+          </a:solidFill>
+          <a:ln>
+            <a:noFill/>
+          </a:ln>
+          <a:effectLst/>
+        </p:spPr>
+        <p:style>
+          <a:lnRef idx="1">
+            <a:schemeClr val="accent1"/>
+          </a:lnRef>
+          <a:fillRef idx="3">
+            <a:schemeClr val="accent1"/>
+          </a:fillRef>
+          <a:effectRef idx="2">
+            <a:schemeClr val="accent1"/>
+          </a:effectRef>
+          <a:fontRef idx="minor">
+            <a:schemeClr val="lt1"/>
+          </a:fontRef>
+        </p:style>
+        <p:txBody>
+          <a:bodyPr rtlCol="0" anchor="ctr" wrap="square" lIns="73152" rIns="73152"/>
+          <a:lstStyle/>
+          <a:p>
+            <a:pPr algn="ctr"/>
+            <a:r>
+              <a:rPr sz="1300" b="1">
+                <a:solidFill>
+                  <a:srgbClr val="DEE2E6"/>
+                </a:solidFill>
+              </a:rPr>
+              <a:t>BattleState</a:t>
+            </a:r>
+          </a:p>
+        </p:txBody>
+      </p:sp>
+      <p:sp>
+        <p:nvSpPr>
+          <p:cNvPr id="11" name="Rounded Rectangle 10"/>
+          <p:cNvSpPr/>
+          <p:nvPr/>
+        </p:nvSpPr>
+        <p:spPr>
+          <a:xfrm>
+            <a:off x="2500884" y="3776472"/>
+            <a:ext cx="2016252" cy="566928"/>
+          </a:xfrm>
+          <a:prstGeom prst="roundRect">
+            <a:avLst>
+              <a:gd name="adj" fmla="val 12000"/>
+            </a:avLst>
+          </a:prstGeom>
+          <a:solidFill>
+            <a:srgbClr val="2E3338"/>
+          </a:solidFill>
+          <a:ln>
+            <a:noFill/>
+          </a:ln>
+          <a:effectLst/>
+        </p:spPr>
+        <p:style>
+          <a:lnRef idx="1">
+            <a:schemeClr val="accent1"/>
+          </a:lnRef>
+          <a:fillRef idx="3">
+            <a:schemeClr val="accent1"/>
+          </a:fillRef>
+          <a:effectRef idx="2">
+            <a:schemeClr val="accent1"/>
+          </a:effectRef>
+          <a:fontRef idx="minor">
+            <a:schemeClr val="lt1"/>
+          </a:fontRef>
+        </p:style>
+        <p:txBody>
+          <a:bodyPr rtlCol="0" anchor="ctr" wrap="square" lIns="73152" rIns="73152"/>
+          <a:lstStyle/>
+          <a:p>
+            <a:pPr algn="ctr"/>
+            <a:r>
+              <a:rPr sz="1300" b="1">
+                <a:solidFill>
+                  <a:srgbClr val="DEE2E6"/>
+                </a:solidFill>
+              </a:rPr>
+              <a:t>Two Mons</a:t>
+            </a:r>
+          </a:p>
+          <a:p>
+            <a:pPr algn="ctr"/>
+            <a:r>
+              <a:rPr sz="1100" b="0">
+                <a:solidFill>
+                  <a:srgbClr val="9AA3AB"/>
+                </a:solidFill>
+              </a:rPr>
+              <a:t>and three bars</a:t>
+            </a:r>
+          </a:p>
+        </p:txBody>
+      </p:sp>
+      <p:cxnSp>
+        <p:nvCxnSpPr>
+          <p:cNvPr id="12" name="Connector 11"/>
+          <p:cNvCxnSpPr/>
+          <p:nvPr/>
+        </p:nvCxnSpPr>
+        <p:spPr>
+          <a:xfrm>
+            <a:off x="3509010" y="3596640"/>
+            <a:ext cx="0" cy="161544"/>
+          </a:xfrm>
+          <a:prstGeom prst="line">
+            <a:avLst/>
+          </a:prstGeom>
+          <a:ln w="25400">
+            <a:solidFill>
+              <a:srgbClr val="9AA3AB"/>
+            </a:solidFill>
+            <a:tailEnd type="triangle"/>
+          </a:ln>
+        </p:spPr>
+        <p:style>
+          <a:lnRef idx="2">
+            <a:schemeClr val="accent1"/>
+          </a:lnRef>
+          <a:fillRef idx="0">
+            <a:schemeClr val="accent1"/>
+          </a:fillRef>
+          <a:effectRef idx="1">
+            <a:schemeClr val="accent1"/>
+          </a:effectRef>
+          <a:fontRef idx="minor">
+            <a:schemeClr val="tx1"/>
+          </a:fontRef>
+        </p:style>
+      </p:cxnSp>
+      <p:cxnSp>
+        <p:nvCxnSpPr>
+          <p:cNvPr id="13" name="Connector 12"/>
+          <p:cNvCxnSpPr/>
+          <p:nvPr/>
+        </p:nvCxnSpPr>
+        <p:spPr>
+          <a:xfrm>
+            <a:off x="3509010" y="2831592"/>
+            <a:ext cx="0" cy="161544"/>
+          </a:xfrm>
+          <a:prstGeom prst="line">
+            <a:avLst/>
+          </a:prstGeom>
+          <a:ln w="25400">
+            <a:solidFill>
+              <a:srgbClr val="9AA3AB"/>
+            </a:solidFill>
+            <a:tailEnd type="triangle"/>
+          </a:ln>
+        </p:spPr>
+        <p:style>
+          <a:lnRef idx="2">
+            <a:schemeClr val="accent1"/>
+          </a:lnRef>
+          <a:fillRef idx="0">
+            <a:schemeClr val="accent1"/>
+          </a:fillRef>
+          <a:effectRef idx="1">
+            <a:schemeClr val="accent1"/>
+          </a:effectRef>
+          <a:fontRef idx="minor">
+            <a:schemeClr val="tx1"/>
+          </a:fontRef>
+        </p:style>
+      </p:cxnSp>
+      <p:sp>
+        <p:nvSpPr>
+          <p:cNvPr id="14" name="Rounded Rectangle 13"/>
+          <p:cNvSpPr/>
+          <p:nvPr/>
+        </p:nvSpPr>
+        <p:spPr>
+          <a:xfrm>
+            <a:off x="4626864" y="3011424"/>
+            <a:ext cx="2016252" cy="566928"/>
+          </a:xfrm>
+          <a:prstGeom prst="roundRect">
+            <a:avLst>
+              <a:gd name="adj" fmla="val 12000"/>
+            </a:avLst>
+          </a:prstGeom>
+          <a:solidFill>
+            <a:srgbClr val="2E3338"/>
+          </a:solidFill>
+          <a:ln>
+            <a:noFill/>
+          </a:ln>
+          <a:effectLst/>
+        </p:spPr>
+        <p:style>
+          <a:lnRef idx="1">
+            <a:schemeClr val="accent1"/>
+          </a:lnRef>
+          <a:fillRef idx="3">
+            <a:schemeClr val="accent1"/>
+          </a:fillRef>
+          <a:effectRef idx="2">
+            <a:schemeClr val="accent1"/>
+          </a:effectRef>
+          <a:fontRef idx="minor">
+            <a:schemeClr val="lt1"/>
+          </a:fontRef>
+        </p:style>
+        <p:txBody>
+          <a:bodyPr rtlCol="0" anchor="ctr" wrap="square" lIns="73152" rIns="73152"/>
+          <a:lstStyle/>
+          <a:p>
+            <a:pPr algn="ctr"/>
+            <a:r>
+              <a:rPr sz="1300" b="1">
+                <a:solidFill>
+                  <a:srgbClr val="DEE2E6"/>
+                </a:solidFill>
+              </a:rPr>
+              <a:t>Menus, messages, fades</a:t>
+            </a:r>
+          </a:p>
+          <a:p>
+            <a:pPr algn="ctr"/>
+            <a:r>
+              <a:rPr sz="1100" b="0">
+                <a:solidFill>
+                  <a:srgbClr val="9AA3AB"/>
+                </a:solidFill>
+              </a:rPr>
+              <a:t>pushed on top</a:t>
+            </a:r>
+          </a:p>
+        </p:txBody>
+      </p:sp>
+      <p:cxnSp>
+        <p:nvCxnSpPr>
+          <p:cNvPr id="15" name="Connector 14"/>
+          <p:cNvCxnSpPr/>
+          <p:nvPr/>
+        </p:nvCxnSpPr>
+        <p:spPr>
+          <a:xfrm>
+            <a:off x="3509010" y="2831592"/>
+            <a:ext cx="2125980" cy="161544"/>
+          </a:xfrm>
+          <a:prstGeom prst="line">
+            <a:avLst/>
+          </a:prstGeom>
+          <a:ln w="25400">
+            <a:solidFill>
+              <a:srgbClr val="9AA3AB"/>
+            </a:solidFill>
+            <a:tailEnd type="triangle"/>
+          </a:ln>
+        </p:spPr>
+        <p:style>
+          <a:lnRef idx="2">
+            <a:schemeClr val="accent1"/>
+          </a:lnRef>
+          <a:fillRef idx="0">
+            <a:schemeClr val="accent1"/>
+          </a:fillRef>
+          <a:effectRef idx="1">
+            <a:schemeClr val="accent1"/>
+          </a:effectRef>
+          <a:fontRef idx="minor">
+            <a:schemeClr val="tx1"/>
+          </a:fontRef>
+        </p:style>
+      </p:cxnSp>
+      <p:cxnSp>
+        <p:nvCxnSpPr>
+          <p:cNvPr id="16" name="Connector 15"/>
+          <p:cNvCxnSpPr/>
+          <p:nvPr/>
+        </p:nvCxnSpPr>
+        <p:spPr>
+          <a:xfrm flipH="1">
+            <a:off x="3509010" y="2066544"/>
+            <a:ext cx="1062990" cy="161544"/>
+          </a:xfrm>
+          <a:prstGeom prst="line">
+            <a:avLst/>
+          </a:prstGeom>
+          <a:ln w="25400">
+            <a:solidFill>
+              <a:srgbClr val="9AA3AB"/>
+            </a:solidFill>
+            <a:tailEnd type="triangle"/>
+          </a:ln>
+        </p:spPr>
+        <p:style>
+          <a:lnRef idx="2">
+            <a:schemeClr val="accent1"/>
+          </a:lnRef>
+          <a:fillRef idx="0">
+            <a:schemeClr val="accent1"/>
+          </a:fillRef>
+          <a:effectRef idx="1">
+            <a:schemeClr val="accent1"/>
+          </a:effectRef>
+          <a:fontRef idx="minor">
+            <a:schemeClr val="tx1"/>
+          </a:fontRef>
+        </p:style>
+      </p:cxnSp>
+      <p:sp>
+        <p:nvSpPr>
+          <p:cNvPr id="17" name="Rounded Rectangle 16"/>
+          <p:cNvSpPr/>
+          <p:nvPr/>
+        </p:nvSpPr>
+        <p:spPr>
+          <a:xfrm>
+            <a:off x="6752844" y="2246376"/>
+            <a:ext cx="2016252" cy="566928"/>
+          </a:xfrm>
+          <a:prstGeom prst="roundRect">
+            <a:avLst>
+              <a:gd name="adj" fmla="val 12000"/>
+            </a:avLst>
+          </a:prstGeom>
+          <a:solidFill>
+            <a:srgbClr val="2E3338"/>
+          </a:solidFill>
+          <a:ln>
+            <a:noFill/>
+          </a:ln>
+          <a:effectLst/>
+        </p:spPr>
+        <p:style>
+          <a:lnRef idx="1">
+            <a:schemeClr val="accent1"/>
+          </a:lnRef>
+          <a:fillRef idx="3">
+            <a:schemeClr val="accent1"/>
+          </a:fillRef>
+          <a:effectRef idx="2">
+            <a:schemeClr val="accent1"/>
+          </a:effectRef>
+          <a:fontRef idx="minor">
+            <a:schemeClr val="lt1"/>
+          </a:fontRef>
+        </p:style>
+        <p:txBody>
+          <a:bodyPr rtlCol="0" anchor="ctr" wrap="square" lIns="73152" rIns="73152"/>
+          <a:lstStyle/>
+          <a:p>
+            <a:pPr algn="ctr"/>
+            <a:r>
+              <a:rPr sz="1300" b="1">
+                <a:solidFill>
+                  <a:srgbClr val="DEE2E6"/>
+                </a:solidFill>
+              </a:rPr>
+              <a:t>Locator</a:t>
+            </a:r>
+          </a:p>
+          <a:p>
+            <a:pPr algn="ctr"/>
+            <a:r>
+              <a:rPr sz="1100" b="0">
+                <a:solidFill>
+                  <a:srgbClr val="9AA3AB"/>
+                </a:solidFill>
+              </a:rPr>
+              <a:t>hands out services</a:t>
+            </a:r>
+          </a:p>
+        </p:txBody>
+      </p:sp>
+      <p:sp>
+        <p:nvSpPr>
+          <p:cNvPr id="18" name="Rounded Rectangle 17"/>
+          <p:cNvSpPr/>
+          <p:nvPr/>
+        </p:nvSpPr>
+        <p:spPr>
+          <a:xfrm>
+            <a:off x="6752844" y="3011424"/>
+            <a:ext cx="2016252" cy="566928"/>
+          </a:xfrm>
+          <a:prstGeom prst="roundRect">
+            <a:avLst>
+              <a:gd name="adj" fmla="val 12000"/>
+            </a:avLst>
+          </a:prstGeom>
+          <a:solidFill>
+            <a:srgbClr val="2E3338"/>
+          </a:solidFill>
+          <a:ln>
+            <a:noFill/>
+          </a:ln>
+          <a:effectLst/>
+        </p:spPr>
+        <p:style>
+          <a:lnRef idx="1">
+            <a:schemeClr val="accent1"/>
+          </a:lnRef>
+          <a:fillRef idx="3">
+            <a:schemeClr val="accent1"/>
+          </a:fillRef>
+          <a:effectRef idx="2">
+            <a:schemeClr val="accent1"/>
+          </a:effectRef>
+          <a:fontRef idx="minor">
+            <a:schemeClr val="lt1"/>
+          </a:fontRef>
+        </p:style>
+        <p:txBody>
+          <a:bodyPr rtlCol="0" anchor="ctr" wrap="square" lIns="73152" rIns="73152"/>
+          <a:lstStyle/>
+          <a:p>
+            <a:pPr algn="ctr"/>
+            <a:r>
+              <a:rPr sz="1300" b="1">
+                <a:solidFill>
+                  <a:srgbClr val="DEE2E6"/>
+                </a:solidFill>
+              </a:rPr>
+              <a:t>IAudio, tweens, assets</a:t>
+            </a:r>
+          </a:p>
+        </p:txBody>
+      </p:sp>
+      <p:cxnSp>
+        <p:nvCxnSpPr>
+          <p:cNvPr id="19" name="Connector 18"/>
+          <p:cNvCxnSpPr/>
+          <p:nvPr/>
+        </p:nvCxnSpPr>
+        <p:spPr>
+          <a:xfrm>
+            <a:off x="7760970" y="2831592"/>
+            <a:ext cx="0" cy="161544"/>
+          </a:xfrm>
+          <a:prstGeom prst="line">
+            <a:avLst/>
+          </a:prstGeom>
+          <a:ln w="25400">
+            <a:solidFill>
+              <a:srgbClr val="9AA3AB"/>
+            </a:solidFill>
+            <a:tailEnd type="triangle"/>
+          </a:ln>
+        </p:spPr>
+        <p:style>
+          <a:lnRef idx="2">
+            <a:schemeClr val="accent1"/>
+          </a:lnRef>
+          <a:fillRef idx="0">
+            <a:schemeClr val="accent1"/>
+          </a:fillRef>
+          <a:effectRef idx="1">
+            <a:schemeClr val="accent1"/>
+          </a:effectRef>
+          <a:fontRef idx="minor">
+            <a:schemeClr val="tx1"/>
+          </a:fontRef>
+        </p:style>
+      </p:cxnSp>
+      <p:cxnSp>
+        <p:nvCxnSpPr>
+          <p:cNvPr id="20" name="Connector 19"/>
+          <p:cNvCxnSpPr/>
+          <p:nvPr/>
+        </p:nvCxnSpPr>
+        <p:spPr>
+          <a:xfrm>
+            <a:off x="4572000" y="2066544"/>
+            <a:ext cx="3188970" cy="161544"/>
+          </a:xfrm>
+          <a:prstGeom prst="line">
+            <a:avLst/>
+          </a:prstGeom>
+          <a:ln w="25400">
+            <a:solidFill>
+              <a:srgbClr val="9AA3AB"/>
+            </a:solidFill>
+            <a:tailEnd type="triangle"/>
+          </a:ln>
+        </p:spPr>
+        <p:style>
+          <a:lnRef idx="2">
+            <a:schemeClr val="accent1"/>
+          </a:lnRef>
+          <a:fillRef idx="0">
+            <a:schemeClr val="accent1"/>
+          </a:fillRef>
+          <a:effectRef idx="1">
+            <a:schemeClr val="accent1"/>
+          </a:effectRef>
+          <a:fontRef idx="minor">
+            <a:schemeClr val="tx1"/>
+          </a:fontRef>
+        </p:style>
+      </p:cxnSp>
+      <p:sp>
+        <p:nvSpPr>
+          <p:cNvPr id="21" name="TextBox 20"/>
+          <p:cNvSpPr txBox="1"/>
+          <p:nvPr/>
+        </p:nvSpPr>
+        <p:spPr>
+          <a:xfrm>
+            <a:off x="457200" y="4462272"/>
+            <a:ext cx="8229600" cy="365760"/>
+          </a:xfrm>
+          <a:prstGeom prst="rect">
+            <a:avLst/>
+          </a:prstGeom>
+          <a:noFill/>
+        </p:spPr>
+        <p:txBody>
+          <a:bodyPr wrap="square">
+            <a:spAutoFit/>
+          </a:bodyPr>
+          <a:lstStyle/>
+          <a:p>
+            <a:pPr algn="ctr"/>
+            <a:r>
+              <a:rPr sz="1300" b="0" i="0">
+                <a:solidFill>
+                  <a:srgbClr val="9AA3AB"/>
+                </a:solidFill>
+              </a:rPr>
+              <a:t>Every state is given the stack, so any state can push and pop.</a:t>
+            </a:r>
+          </a:p>
+        </p:txBody>
+      </p:sp>
+    </p:spTree>
+  </p:cSld>
+  <p:clrMapOvr>
+    <a:masterClrMapping/>
+  </p:clrMapOvr>
+</p:sld>
+</file>
+
+<file path=ppt/slides/slide35.xml><?xml version="1.0" encoding="utf-8"?>
+<p:sld xmlns:a="http://schemas.openxmlformats.org/drawingml/2006/main" xmlns:p="http://schemas.openxmlformats.org/presentationml/2006/main" xmlns:r="http://schemas.openxmlformats.org/officeDocument/2006/relationships">
+  <p:cSld>
+    <p:spTree>
+      <p:nvGrpSpPr>
+        <p:cNvPr id="1" name=""/>
+        <p:cNvGrpSpPr/>
+        <p:nvPr/>
+      </p:nvGrpSpPr>
+      <p:grpSpPr/>
+      <p:sp>
+        <p:nvSpPr>
+          <p:cNvPr id="2" name="Title 1"/>
+          <p:cNvSpPr>
+            <a:spLocks noGrp="1"/>
+          </p:cNvSpPr>
+          <p:nvPr>
+            <p:ph type="title"/>
+          </p:nvPr>
+        </p:nvSpPr>
+        <p:spPr/>
+        <p:txBody>
+          <a:bodyPr/>
+          <a:lstStyle/>
+          <a:p>
+            <a:pPr indent="0" lvl="0" marL="0" rtl="0" algn="l">
+              <a:spcBef>
+                <a:spcPts val="0"/>
+              </a:spcBef>
+              <a:spcAft>
+                <a:spcPts val="0"/>
+              </a:spcAft>
+              <a:buNone/>
+            </a:pPr>
+            <a:r>
+              <a:rPr lang="en"/>
+              <a:t>Summary</a:t>
+            </a:r>
+            <a:endParaRPr/>
+          </a:p>
+        </p:txBody>
+      </p:sp>
+      <p:sp>
+        <p:nvSpPr>
+          <p:cNvPr id="3" name="Text Placeholder 2"/>
+          <p:cNvSpPr>
+            <a:spLocks noGrp="1"/>
+          </p:cNvSpPr>
+          <p:nvPr>
+            <p:ph type="body" idx="1"/>
+          </p:nvPr>
+        </p:nvSpPr>
+        <p:spPr>
+          <a:xfrm>
+            <a:off x="311700" y="885950"/>
+            <a:ext cx="8520600" cy="521208"/>
+          </a:xfrm>
+        </p:spPr>
+        <p:txBody>
+          <a:bodyPr/>
+          <a:lstStyle/>
+          <a:p>
+            <a:pPr indent="-330200" lvl="0" marL="457200" rtl="0" algn="l">
+              <a:spcBef>
+                <a:spcPts val="0"/>
+              </a:spcBef>
+              <a:spcAft>
+                <a:spcPts val="0"/>
+              </a:spcAft>
+              <a:buSzPts val="1600"/>
+              <a:buChar char="●"/>
+            </a:pPr>
+            <a:r>
+              <a:rPr lang="en" b="1"/>
+              <a:t>Seven concerns, and this session’s answer to each.</a:t>
+            </a:r>
+            <a:endParaRPr/>
+          </a:p>
+        </p:txBody>
+      </p:sp>
+      <p:sp>
+        <p:nvSpPr>
+          <p:cNvPr id="4" name="Rounded Rectangle 3"/>
+          <p:cNvSpPr/>
+          <p:nvPr/>
+        </p:nvSpPr>
+        <p:spPr>
+          <a:xfrm>
+            <a:off x="548640" y="1417320"/>
+            <a:ext cx="2560320" cy="841248"/>
+          </a:xfrm>
+          <a:prstGeom prst="roundRect">
+            <a:avLst>
+              <a:gd name="adj" fmla="val 12000"/>
+            </a:avLst>
+          </a:prstGeom>
+          <a:solidFill>
+            <a:srgbClr val="2E3338"/>
+          </a:solidFill>
+          <a:ln>
+            <a:noFill/>
+          </a:ln>
+          <a:effectLst/>
+        </p:spPr>
+        <p:style>
+          <a:lnRef idx="1">
+            <a:schemeClr val="accent1"/>
+          </a:lnRef>
+          <a:fillRef idx="3">
+            <a:schemeClr val="accent1"/>
+          </a:fillRef>
+          <a:effectRef idx="2">
+            <a:schemeClr val="accent1"/>
+          </a:effectRef>
+          <a:fontRef idx="minor">
+            <a:schemeClr val="lt1"/>
+          </a:fontRef>
+        </p:style>
+        <p:txBody>
+          <a:bodyPr rtlCol="0" anchor="ctr" wrap="square" lIns="73152" rIns="73152"/>
+          <a:lstStyle/>
+          <a:p>
+            <a:pPr algn="ctr"/>
+            <a:r>
+              <a:rPr sz="1500" b="1">
+                <a:solidFill>
+                  <a:srgbClr val="DEE2E6"/>
+                </a:solidFill>
+              </a:rPr>
+              <a:t>Screens on top of each other</a:t>
+            </a:r>
+          </a:p>
+          <a:p>
+            <a:pPr algn="ctr"/>
+            <a:r>
+              <a:rPr sz="1300" b="0">
+                <a:solidFill>
+                  <a:srgbClr val="9AA3AB"/>
+                </a:solidFill>
+              </a:rPr>
+              <a:t>A state stack</a:t>
+            </a:r>
+          </a:p>
+        </p:txBody>
+      </p:sp>
+      <p:sp>
+        <p:nvSpPr>
+          <p:cNvPr id="5" name="Rounded Rectangle 4"/>
+          <p:cNvSpPr/>
+          <p:nvPr/>
+        </p:nvSpPr>
+        <p:spPr>
+          <a:xfrm>
+            <a:off x="3291840" y="1417320"/>
+            <a:ext cx="2560320" cy="841248"/>
+          </a:xfrm>
+          <a:prstGeom prst="roundRect">
+            <a:avLst>
+              <a:gd name="adj" fmla="val 12000"/>
+            </a:avLst>
+          </a:prstGeom>
+          <a:solidFill>
+            <a:srgbClr val="2E3338"/>
+          </a:solidFill>
+          <a:ln>
+            <a:noFill/>
+          </a:ln>
+          <a:effectLst/>
+        </p:spPr>
+        <p:style>
+          <a:lnRef idx="1">
+            <a:schemeClr val="accent1"/>
+          </a:lnRef>
+          <a:fillRef idx="3">
+            <a:schemeClr val="accent1"/>
+          </a:fillRef>
+          <a:effectRef idx="2">
+            <a:schemeClr val="accent1"/>
+          </a:effectRef>
+          <a:fontRef idx="minor">
+            <a:schemeClr val="lt1"/>
+          </a:fontRef>
+        </p:style>
+        <p:txBody>
+          <a:bodyPr rtlCol="0" anchor="ctr" wrap="square" lIns="73152" rIns="73152"/>
+          <a:lstStyle/>
+          <a:p>
+            <a:pPr algn="ctr"/>
+            <a:r>
+              <a:rPr sz="1500" b="1">
+                <a:solidFill>
+                  <a:srgbClr val="DEE2E6"/>
+                </a:solidFill>
+              </a:rPr>
+              <a:t>Menus, bars and text boxes</a:t>
+            </a:r>
+          </a:p>
+          <a:p>
+            <a:pPr algn="ctr"/>
+            <a:r>
+              <a:rPr sz="1300" b="0">
+                <a:solidFill>
+                  <a:srgbClr val="9AA3AB"/>
+                </a:solidFill>
+              </a:rPr>
+              <a:t>Reusable widgets</a:t>
+            </a:r>
+          </a:p>
+        </p:txBody>
+      </p:sp>
+      <p:sp>
+        <p:nvSpPr>
+          <p:cNvPr id="6" name="Rounded Rectangle 5"/>
+          <p:cNvSpPr/>
+          <p:nvPr/>
+        </p:nvSpPr>
+        <p:spPr>
+          <a:xfrm>
+            <a:off x="6035040" y="1417320"/>
+            <a:ext cx="2560320" cy="841248"/>
+          </a:xfrm>
+          <a:prstGeom prst="roundRect">
+            <a:avLst>
+              <a:gd name="adj" fmla="val 12000"/>
+            </a:avLst>
+          </a:prstGeom>
+          <a:solidFill>
+            <a:srgbClr val="2E3338"/>
+          </a:solidFill>
+          <a:ln>
+            <a:noFill/>
+          </a:ln>
+          <a:effectLst/>
+        </p:spPr>
+        <p:style>
+          <a:lnRef idx="1">
+            <a:schemeClr val="accent1"/>
+          </a:lnRef>
+          <a:fillRef idx="3">
+            <a:schemeClr val="accent1"/>
+          </a:fillRef>
+          <a:effectRef idx="2">
+            <a:schemeClr val="accent1"/>
+          </a:effectRef>
+          <a:fontRef idx="minor">
+            <a:schemeClr val="lt1"/>
+          </a:fontRef>
+        </p:style>
+        <p:txBody>
+          <a:bodyPr rtlCol="0" anchor="ctr" wrap="square" lIns="73152" rIns="73152"/>
+          <a:lstStyle/>
+          <a:p>
+            <a:pPr algn="ctr"/>
+            <a:r>
+              <a:rPr sz="1500" b="1">
+                <a:solidFill>
+                  <a:srgbClr val="DEE2E6"/>
+                </a:solidFill>
+              </a:rPr>
+              <a:t>A bar that follows the data</a:t>
+            </a:r>
+          </a:p>
+          <a:p>
+            <a:pPr algn="ctr"/>
+            <a:r>
+              <a:rPr sz="1300" b="0">
+                <a:solidFill>
+                  <a:srgbClr val="9AA3AB"/>
+                </a:solidFill>
+              </a:rPr>
+              <a:t>The view observes the model</a:t>
+            </a:r>
+          </a:p>
+        </p:txBody>
+      </p:sp>
+      <p:sp>
+        <p:nvSpPr>
+          <p:cNvPr id="7" name="Rounded Rectangle 6"/>
+          <p:cNvSpPr/>
+          <p:nvPr/>
+        </p:nvSpPr>
+        <p:spPr>
+          <a:xfrm>
+            <a:off x="548640" y="2395728"/>
+            <a:ext cx="2560320" cy="841248"/>
+          </a:xfrm>
+          <a:prstGeom prst="roundRect">
+            <a:avLst>
+              <a:gd name="adj" fmla="val 12000"/>
+            </a:avLst>
+          </a:prstGeom>
+          <a:solidFill>
+            <a:srgbClr val="2E3338"/>
+          </a:solidFill>
+          <a:ln>
+            <a:noFill/>
+          </a:ln>
+          <a:effectLst/>
+        </p:spPr>
+        <p:style>
+          <a:lnRef idx="1">
+            <a:schemeClr val="accent1"/>
+          </a:lnRef>
+          <a:fillRef idx="3">
+            <a:schemeClr val="accent1"/>
+          </a:fillRef>
+          <a:effectRef idx="2">
+            <a:schemeClr val="accent1"/>
+          </a:effectRef>
+          <a:fontRef idx="minor">
+            <a:schemeClr val="lt1"/>
+          </a:fontRef>
+        </p:style>
+        <p:txBody>
+          <a:bodyPr rtlCol="0" anchor="ctr" wrap="square" lIns="73152" rIns="73152"/>
+          <a:lstStyle/>
+          <a:p>
+            <a:pPr algn="ctr"/>
+            <a:r>
+              <a:rPr sz="1500" b="1">
+                <a:solidFill>
+                  <a:srgbClr val="DEE2E6"/>
+                </a:solidFill>
+              </a:rPr>
+              <a:t>One thing after another</a:t>
+            </a:r>
+          </a:p>
+          <a:p>
+            <a:pPr algn="ctr"/>
+            <a:r>
+              <a:rPr sz="1300" b="0">
+                <a:solidFill>
+                  <a:srgbClr val="9AA3AB"/>
+                </a:solidFill>
+              </a:rPr>
+              <a:t>Chains of tweens</a:t>
+            </a:r>
+          </a:p>
+        </p:txBody>
+      </p:sp>
+      <p:sp>
+        <p:nvSpPr>
+          <p:cNvPr id="8" name="Rounded Rectangle 7"/>
+          <p:cNvSpPr/>
+          <p:nvPr/>
+        </p:nvSpPr>
+        <p:spPr>
+          <a:xfrm>
+            <a:off x="3291840" y="2395728"/>
+            <a:ext cx="2560320" cy="841248"/>
+          </a:xfrm>
+          <a:prstGeom prst="roundRect">
+            <a:avLst>
+              <a:gd name="adj" fmla="val 12000"/>
+            </a:avLst>
+          </a:prstGeom>
+          <a:solidFill>
+            <a:srgbClr val="2E3338"/>
+          </a:solidFill>
+          <a:ln>
+            <a:noFill/>
+          </a:ln>
+          <a:effectLst/>
+        </p:spPr>
+        <p:style>
+          <a:lnRef idx="1">
+            <a:schemeClr val="accent1"/>
+          </a:lnRef>
+          <a:fillRef idx="3">
+            <a:schemeClr val="accent1"/>
+          </a:fillRef>
+          <a:effectRef idx="2">
+            <a:schemeClr val="accent1"/>
+          </a:effectRef>
+          <a:fontRef idx="minor">
+            <a:schemeClr val="lt1"/>
+          </a:fontRef>
+        </p:style>
+        <p:txBody>
+          <a:bodyPr rtlCol="0" anchor="ctr" wrap="square" lIns="73152" rIns="73152"/>
+          <a:lstStyle/>
+          <a:p>
+            <a:pPr algn="ctr"/>
+            <a:r>
+              <a:rPr sz="1500" b="1">
+                <a:solidFill>
+                  <a:srgbClr val="DEE2E6"/>
+                </a:solidFill>
+              </a:rPr>
+              <a:t>Species and monsters</a:t>
+            </a:r>
+          </a:p>
+          <a:p>
+            <a:pPr algn="ctr"/>
+            <a:r>
+              <a:rPr sz="1300" b="0">
+                <a:solidFill>
+                  <a:srgbClr val="9AA3AB"/>
+                </a:solidFill>
+              </a:rPr>
+              <a:t>Type Object</a:t>
+            </a:r>
+          </a:p>
+        </p:txBody>
+      </p:sp>
+      <p:sp>
+        <p:nvSpPr>
+          <p:cNvPr id="9" name="Rounded Rectangle 8"/>
+          <p:cNvSpPr/>
+          <p:nvPr/>
+        </p:nvSpPr>
+        <p:spPr>
+          <a:xfrm>
+            <a:off x="6035040" y="2395728"/>
+            <a:ext cx="2560320" cy="841248"/>
+          </a:xfrm>
+          <a:prstGeom prst="roundRect">
+            <a:avLst>
+              <a:gd name="adj" fmla="val 12000"/>
+            </a:avLst>
+          </a:prstGeom>
+          <a:solidFill>
+            <a:srgbClr val="2E3338"/>
+          </a:solidFill>
+          <a:ln>
+            <a:noFill/>
+          </a:ln>
+          <a:effectLst/>
+        </p:spPr>
+        <p:style>
+          <a:lnRef idx="1">
+            <a:schemeClr val="accent1"/>
+          </a:lnRef>
+          <a:fillRef idx="3">
+            <a:schemeClr val="accent1"/>
+          </a:fillRef>
+          <a:effectRef idx="2">
+            <a:schemeClr val="accent1"/>
+          </a:effectRef>
+          <a:fontRef idx="minor">
+            <a:schemeClr val="lt1"/>
+          </a:fontRef>
+        </p:style>
+        <p:txBody>
+          <a:bodyPr rtlCol="0" anchor="ctr" wrap="square" lIns="73152" rIns="73152"/>
+          <a:lstStyle/>
+          <a:p>
+            <a:pPr algn="ctr"/>
+            <a:r>
+              <a:rPr sz="1500" b="1">
+                <a:solidFill>
+                  <a:srgbClr val="DEE2E6"/>
+                </a:solidFill>
+              </a:rPr>
+              <a:t>Keeping progress</a:t>
+            </a:r>
+          </a:p>
+          <a:p>
+            <a:pPr algn="ctr"/>
+            <a:r>
+              <a:rPr sz="1300" b="0">
+                <a:solidFill>
+                  <a:srgbClr val="9AA3AB"/>
+                </a:solidFill>
+              </a:rPr>
+              <a:t>JSON, with a round-trip test</a:t>
+            </a:r>
+          </a:p>
+        </p:txBody>
+      </p:sp>
+      <p:sp>
+        <p:nvSpPr>
+          <p:cNvPr id="10" name="Rounded Rectangle 9"/>
+          <p:cNvSpPr/>
+          <p:nvPr/>
+        </p:nvSpPr>
+        <p:spPr>
+          <a:xfrm>
+            <a:off x="3291840" y="3374136"/>
+            <a:ext cx="2560320" cy="841248"/>
+          </a:xfrm>
+          <a:prstGeom prst="roundRect">
+            <a:avLst>
+              <a:gd name="adj" fmla="val 12000"/>
+            </a:avLst>
+          </a:prstGeom>
+          <a:solidFill>
+            <a:srgbClr val="2E3338"/>
+          </a:solidFill>
+          <a:ln>
+            <a:noFill/>
+          </a:ln>
+          <a:effectLst/>
+        </p:spPr>
+        <p:style>
+          <a:lnRef idx="1">
+            <a:schemeClr val="accent1"/>
+          </a:lnRef>
+          <a:fillRef idx="3">
+            <a:schemeClr val="accent1"/>
+          </a:fillRef>
+          <a:effectRef idx="2">
+            <a:schemeClr val="accent1"/>
+          </a:effectRef>
+          <a:fontRef idx="minor">
+            <a:schemeClr val="lt1"/>
+          </a:fontRef>
+        </p:style>
+        <p:txBody>
+          <a:bodyPr rtlCol="0" anchor="ctr" wrap="square" lIns="73152" rIns="73152"/>
+          <a:lstStyle/>
+          <a:p>
+            <a:pPr algn="ctr"/>
+            <a:r>
+              <a:rPr sz="1500" b="1">
+                <a:solidFill>
+                  <a:srgbClr val="DEE2E6"/>
+                </a:solidFill>
+              </a:rPr>
+              <a:t>Reaching shared services</a:t>
+            </a:r>
+          </a:p>
+          <a:p>
+            <a:pPr algn="ctr"/>
+            <a:r>
+              <a:rPr sz="1300" b="0">
+                <a:solidFill>
+                  <a:srgbClr val="9AA3AB"/>
+                </a:solidFill>
+              </a:rPr>
+              <a:t>Service Locator, null object</a:t>
+            </a:r>
+          </a:p>
+        </p:txBody>
+      </p:sp>
+    </p:spTree>
+  </p:cSld>
+  <p:clrMapOvr>
+    <a:masterClrMapping/>
+  </p:clrMapOvr>
+</p:sld>
+</file>
+
 <file path=ppt/slides/slide4.xml><?xml version="1.0" encoding="utf-8"?>
 <p:sld xmlns:a="http://schemas.openxmlformats.org/drawingml/2006/main" xmlns:r="http://schemas.openxmlformats.org/officeDocument/2006/relationships" xmlns:mc="http://schemas.openxmlformats.org/markup-compatibility/2006" xmlns:mv="urn:schemas-microsoft-com:mac:vml" xmlns:p="http://schemas.openxmlformats.org/presentationml/2006/main" xmlns:c="http://schemas.openxmlformats.org/drawingml/2006/chart" xmlns:dgm="http://schemas.openxmlformats.org/drawingml/2006/diagram" xmlns:o="urn:schemas-microsoft-com:office:office" xmlns:v="urn:schemas-microsoft-com:vml" xmlns:pvml="urn:schemas-microsoft-com:office:powerpoint" xmlns:com="http://schemas.openxmlformats.org/drawingml/2006/compatibility" xmlns:p14="http://schemas.microsoft.com/office/powerpoint/2010/main" xmlns:p15="http://schemas.microsoft.com/office/powerpoint/2012/main" xmlns:ahyp="http://schemas.microsoft.com/office/drawing/2018/hyperlinkcolor">
   <p:cSld>
